--- a/deliverables/GP_XX_ConsentChain.pptx
+++ b/deliverables/GP_XX_ConsentChain.pptx
@@ -2,17 +2,17 @@
 <file path=ppt/presentation.xml><?xml version="1.0" encoding="utf-8"?>
 <p:presentation xmlns:p="http://schemas.openxmlformats.org/presentationml/2006/main">
   <p:sldMasterIdLst>
-    <p:sldMasterId xmlns:r="http://schemas.openxmlformats.org/officeDocument/2006/relationships" id="2147483648" r:id="R6db71b21349a4f77"/>
+    <p:sldMasterId xmlns:r="http://schemas.openxmlformats.org/officeDocument/2006/relationships" id="2147483648" r:id="Rca17ac6c964b4b97"/>
   </p:sldMasterIdLst>
   <p:notesMasterIdLst>
-    <p:notesMasterId xmlns:r="http://schemas.openxmlformats.org/officeDocument/2006/relationships" r:id="R5c57d41e56384054"/>
+    <p:notesMasterId xmlns:r="http://schemas.openxmlformats.org/officeDocument/2006/relationships" r:id="Rc28a662de7d24c3d"/>
   </p:notesMasterIdLst>
   <p:sldIdLst>
-    <p:sldId xmlns:r="http://schemas.openxmlformats.org/officeDocument/2006/relationships" id="256" r:id="R4a034585cd77402c"/>
-    <p:sldId xmlns:r="http://schemas.openxmlformats.org/officeDocument/2006/relationships" id="257" r:id="Rd6f15879247a4e34"/>
-    <p:sldId xmlns:r="http://schemas.openxmlformats.org/officeDocument/2006/relationships" id="258" r:id="R02398db1f3c84578"/>
-    <p:sldId xmlns:r="http://schemas.openxmlformats.org/officeDocument/2006/relationships" id="259" r:id="R7c902c5073774f74"/>
-    <p:sldId xmlns:r="http://schemas.openxmlformats.org/officeDocument/2006/relationships" id="260" r:id="Rc6a7cc1fc18f42f4"/>
+    <p:sldId xmlns:r="http://schemas.openxmlformats.org/officeDocument/2006/relationships" id="256" r:id="R9c5de9f0d69e4696"/>
+    <p:sldId xmlns:r="http://schemas.openxmlformats.org/officeDocument/2006/relationships" id="257" r:id="R697c0aeab8a24346"/>
+    <p:sldId xmlns:r="http://schemas.openxmlformats.org/officeDocument/2006/relationships" id="258" r:id="R5d9b4a65b18e422e"/>
+    <p:sldId xmlns:r="http://schemas.openxmlformats.org/officeDocument/2006/relationships" id="259" r:id="R8f3af9aa32e94493"/>
+    <p:sldId xmlns:r="http://schemas.openxmlformats.org/officeDocument/2006/relationships" id="260" r:id="R28b25f5f955e4fd4"/>
   </p:sldIdLst>
   <p:sldSz cx="12192000" cy="6858000"/>
   <p:notesSz cx="6858000" cy="9144000"/>
@@ -823,7 +823,7 @@
   </p:cSld>
   <p:clrMap bg1="lt1" tx1="dk1" bg2="lt2" tx2="dk2" accent1="accent1" accent2="accent2" accent3="accent3" accent4="accent4" accent5="accent5" accent6="accent6" hlink="hlink" folHlink="folHlink"/>
   <p:sldLayoutIdLst>
-    <p:sldLayoutId xmlns:r="http://schemas.openxmlformats.org/officeDocument/2006/relationships" id="2147483649" r:id="R92311b4b48c94290"/>
+    <p:sldLayoutId xmlns:r="http://schemas.openxmlformats.org/officeDocument/2006/relationships" id="2147483649" r:id="Re0f50db2fa8e4769"/>
   </p:sldLayoutIdLst>
   <p:txStyles>
     <p:titleStyle>
@@ -1193,6 +1193,7 @@
           <a:lstStyle xmlns:a="http://schemas.openxmlformats.org/drawingml/2006/main"/>
           <a:p xmlns:a="http://schemas.openxmlformats.org/drawingml/2006/main">
             <a:pPr algn="l">
+              <a:buNone/>
               <a:defRPr sz="825" b="0">
                 <a:solidFill>
                   <a:srgbClr val="68766F"/>
@@ -1211,7 +1212,7 @@
                 <a:ea typeface="Aptos"/>
                 <a:cs typeface="Aptos"/>
               </a:rPr>
-              <a:t>EC8204  •  CONSENTCHAIN  •  EG/2021/4877 + EG/2021/4651</a:t>
+              <a:t>EC8204  •  CONSENTCHAIN  •  TEAM 4877 / 4651 / 4667 / 4597</a:t>
             </a:r>
           </a:p>
         </p:txBody>
@@ -1257,6 +1258,7 @@
           <a:lstStyle xmlns:a="http://schemas.openxmlformats.org/drawingml/2006/main"/>
           <a:p xmlns:a="http://schemas.openxmlformats.org/drawingml/2006/main">
             <a:pPr algn="r">
+              <a:buNone/>
               <a:defRPr sz="825" b="0">
                 <a:solidFill>
                   <a:srgbClr val="68766F"/>
@@ -1356,6 +1358,7 @@
           <a:lstStyle xmlns:a="http://schemas.openxmlformats.org/drawingml/2006/main"/>
           <a:p xmlns:a="http://schemas.openxmlformats.org/drawingml/2006/main">
             <a:pPr algn="l">
+              <a:buNone/>
               <a:defRPr sz="900" b="1">
                 <a:solidFill>
                   <a:srgbClr val="2D6A54"/>
@@ -1420,6 +1423,7 @@
           <a:lstStyle xmlns:a="http://schemas.openxmlformats.org/drawingml/2006/main"/>
           <a:p xmlns:a="http://schemas.openxmlformats.org/drawingml/2006/main">
             <a:pPr algn="l">
+              <a:buNone/>
               <a:defRPr sz="3750" b="1">
                 <a:solidFill>
                   <a:srgbClr val="10231F"/>
@@ -1484,6 +1488,7 @@
           <a:lstStyle xmlns:a="http://schemas.openxmlformats.org/drawingml/2006/main"/>
           <a:p xmlns:a="http://schemas.openxmlformats.org/drawingml/2006/main">
             <a:pPr algn="l">
+              <a:buNone/>
               <a:defRPr sz="1575" b="0">
                 <a:solidFill>
                   <a:srgbClr val="68766F"/>
@@ -1583,6 +1588,7 @@
           <a:lstStyle xmlns:a="http://schemas.openxmlformats.org/drawingml/2006/main"/>
           <a:p xmlns:a="http://schemas.openxmlformats.org/drawingml/2006/main">
             <a:pPr algn="l">
+              <a:buNone/>
               <a:defRPr sz="1125" b="1">
                 <a:solidFill>
                   <a:srgbClr val="2D6A54"/>
@@ -1647,6 +1653,7 @@
           <a:lstStyle xmlns:a="http://schemas.openxmlformats.org/drawingml/2006/main"/>
           <a:p xmlns:a="http://schemas.openxmlformats.org/drawingml/2006/main">
             <a:pPr algn="l">
+              <a:buNone/>
               <a:defRPr sz="1725" b="1">
                 <a:solidFill>
                   <a:srgbClr val="10231F"/>
@@ -1711,6 +1718,7 @@
           <a:lstStyle xmlns:a="http://schemas.openxmlformats.org/drawingml/2006/main"/>
           <a:p xmlns:a="http://schemas.openxmlformats.org/drawingml/2006/main">
             <a:pPr algn="l">
+              <a:buNone/>
               <a:defRPr sz="1275" b="0">
                 <a:solidFill>
                   <a:srgbClr val="68766F"/>
@@ -1775,6 +1783,7 @@
           <a:lstStyle xmlns:a="http://schemas.openxmlformats.org/drawingml/2006/main"/>
           <a:p xmlns:a="http://schemas.openxmlformats.org/drawingml/2006/main">
             <a:pPr algn="l">
+              <a:buNone/>
               <a:defRPr sz="1125" b="1">
                 <a:solidFill>
                   <a:srgbClr val="2D6A54"/>
@@ -1839,6 +1848,7 @@
           <a:lstStyle xmlns:a="http://schemas.openxmlformats.org/drawingml/2006/main"/>
           <a:p xmlns:a="http://schemas.openxmlformats.org/drawingml/2006/main">
             <a:pPr algn="l">
+              <a:buNone/>
               <a:defRPr sz="1725" b="1">
                 <a:solidFill>
                   <a:srgbClr val="10231F"/>
@@ -1903,6 +1913,7 @@
           <a:lstStyle xmlns:a="http://schemas.openxmlformats.org/drawingml/2006/main"/>
           <a:p xmlns:a="http://schemas.openxmlformats.org/drawingml/2006/main">
             <a:pPr algn="l">
+              <a:buNone/>
               <a:defRPr sz="1275" b="0">
                 <a:solidFill>
                   <a:srgbClr val="68766F"/>
@@ -1967,6 +1978,7 @@
           <a:lstStyle xmlns:a="http://schemas.openxmlformats.org/drawingml/2006/main"/>
           <a:p xmlns:a="http://schemas.openxmlformats.org/drawingml/2006/main">
             <a:pPr algn="l">
+              <a:buNone/>
               <a:defRPr sz="1125" b="1">
                 <a:solidFill>
                   <a:srgbClr val="2D6A54"/>
@@ -2031,6 +2043,7 @@
           <a:lstStyle xmlns:a="http://schemas.openxmlformats.org/drawingml/2006/main"/>
           <a:p xmlns:a="http://schemas.openxmlformats.org/drawingml/2006/main">
             <a:pPr algn="l">
+              <a:buNone/>
               <a:defRPr sz="1725" b="1">
                 <a:solidFill>
                   <a:srgbClr val="10231F"/>
@@ -2095,6 +2108,7 @@
           <a:lstStyle xmlns:a="http://schemas.openxmlformats.org/drawingml/2006/main"/>
           <a:p xmlns:a="http://schemas.openxmlformats.org/drawingml/2006/main">
             <a:pPr algn="l">
+              <a:buNone/>
               <a:defRPr sz="1275" b="0">
                 <a:solidFill>
                   <a:srgbClr val="68766F"/>
@@ -2216,6 +2230,7 @@
           <a:lstStyle xmlns:a="http://schemas.openxmlformats.org/drawingml/2006/main"/>
           <a:p xmlns:a="http://schemas.openxmlformats.org/drawingml/2006/main">
             <a:pPr algn="l">
+              <a:buNone/>
               <a:defRPr sz="825" b="0">
                 <a:solidFill>
                   <a:srgbClr val="A9BBB4"/>
@@ -2234,7 +2249,7 @@
                 <a:ea typeface="Aptos"/>
                 <a:cs typeface="Aptos"/>
               </a:rPr>
-              <a:t>EC8204  •  CONSENTCHAIN  •  EG/2021/4877 + EG/2021/4651</a:t>
+              <a:t>EC8204  •  CONSENTCHAIN  •  TEAM 4877 / 4651 / 4667 / 4597</a:t>
             </a:r>
           </a:p>
         </p:txBody>
@@ -2280,6 +2295,7 @@
           <a:lstStyle xmlns:a="http://schemas.openxmlformats.org/drawingml/2006/main"/>
           <a:p xmlns:a="http://schemas.openxmlformats.org/drawingml/2006/main">
             <a:pPr algn="r">
+              <a:buNone/>
               <a:defRPr sz="825" b="0">
                 <a:solidFill>
                   <a:srgbClr val="A9BBB4"/>
@@ -2379,6 +2395,7 @@
           <a:lstStyle xmlns:a="http://schemas.openxmlformats.org/drawingml/2006/main"/>
           <a:p xmlns:a="http://schemas.openxmlformats.org/drawingml/2006/main">
             <a:pPr algn="l">
+              <a:buNone/>
               <a:defRPr sz="900" b="1">
                 <a:solidFill>
                   <a:srgbClr val="C8F36B"/>
@@ -2443,6 +2460,7 @@
           <a:lstStyle xmlns:a="http://schemas.openxmlformats.org/drawingml/2006/main"/>
           <a:p xmlns:a="http://schemas.openxmlformats.org/drawingml/2006/main">
             <a:pPr algn="l">
+              <a:buNone/>
               <a:defRPr sz="3450" b="1">
                 <a:solidFill>
                   <a:srgbClr val="FFFFFF"/>
@@ -2542,6 +2560,7 @@
           <a:lstStyle xmlns:a="http://schemas.openxmlformats.org/drawingml/2006/main"/>
           <a:p xmlns:a="http://schemas.openxmlformats.org/drawingml/2006/main">
             <a:pPr algn="l">
+              <a:buNone/>
               <a:defRPr sz="1575" b="1">
                 <a:solidFill>
                   <a:srgbClr val="10231F"/>
@@ -2606,6 +2625,7 @@
           <a:lstStyle xmlns:a="http://schemas.openxmlformats.org/drawingml/2006/main"/>
           <a:p xmlns:a="http://schemas.openxmlformats.org/drawingml/2006/main">
             <a:pPr algn="l">
+              <a:buNone/>
               <a:defRPr sz="1050" b="0">
                 <a:solidFill>
                   <a:srgbClr val="10231F"/>
@@ -2705,6 +2725,7 @@
           <a:lstStyle xmlns:a="http://schemas.openxmlformats.org/drawingml/2006/main"/>
           <a:p xmlns:a="http://schemas.openxmlformats.org/drawingml/2006/main">
             <a:pPr algn="l">
+              <a:buNone/>
               <a:defRPr sz="1575" b="1">
                 <a:solidFill>
                   <a:srgbClr val="10231F"/>
@@ -2769,6 +2790,7 @@
           <a:lstStyle xmlns:a="http://schemas.openxmlformats.org/drawingml/2006/main"/>
           <a:p xmlns:a="http://schemas.openxmlformats.org/drawingml/2006/main">
             <a:pPr algn="l">
+              <a:buNone/>
               <a:defRPr sz="1050" b="0">
                 <a:solidFill>
                   <a:srgbClr val="10231F"/>
@@ -2868,6 +2890,7 @@
           <a:lstStyle xmlns:a="http://schemas.openxmlformats.org/drawingml/2006/main"/>
           <a:p xmlns:a="http://schemas.openxmlformats.org/drawingml/2006/main">
             <a:pPr algn="l">
+              <a:buNone/>
               <a:defRPr sz="1575" b="1">
                 <a:solidFill>
                   <a:srgbClr val="10231F"/>
@@ -2932,6 +2955,7 @@
           <a:lstStyle xmlns:a="http://schemas.openxmlformats.org/drawingml/2006/main"/>
           <a:p xmlns:a="http://schemas.openxmlformats.org/drawingml/2006/main">
             <a:pPr algn="l">
+              <a:buNone/>
               <a:defRPr sz="1050" b="0">
                 <a:solidFill>
                   <a:srgbClr val="10231F"/>
@@ -3031,6 +3055,7 @@
           <a:lstStyle xmlns:a="http://schemas.openxmlformats.org/drawingml/2006/main"/>
           <a:p xmlns:a="http://schemas.openxmlformats.org/drawingml/2006/main">
             <a:pPr algn="l">
+              <a:buNone/>
               <a:defRPr sz="1575" b="1">
                 <a:solidFill>
                   <a:srgbClr val="FFFFFF"/>
@@ -3095,6 +3120,7 @@
           <a:lstStyle xmlns:a="http://schemas.openxmlformats.org/drawingml/2006/main"/>
           <a:p xmlns:a="http://schemas.openxmlformats.org/drawingml/2006/main">
             <a:pPr algn="l">
+              <a:buNone/>
               <a:defRPr sz="1050" b="0">
                 <a:solidFill>
                   <a:srgbClr val="FFFFFF"/>
@@ -3194,6 +3220,7 @@
           <a:lstStyle xmlns:a="http://schemas.openxmlformats.org/drawingml/2006/main"/>
           <a:p xmlns:a="http://schemas.openxmlformats.org/drawingml/2006/main">
             <a:pPr algn="ctr">
+              <a:buNone/>
               <a:defRPr sz="675" b="1">
                 <a:solidFill>
                   <a:srgbClr val="C8F36B"/>
@@ -3293,6 +3320,7 @@
           <a:lstStyle xmlns:a="http://schemas.openxmlformats.org/drawingml/2006/main"/>
           <a:p xmlns:a="http://schemas.openxmlformats.org/drawingml/2006/main">
             <a:pPr algn="ctr">
+              <a:buNone/>
               <a:defRPr sz="675" b="1">
                 <a:solidFill>
                   <a:srgbClr val="C8F36B"/>
@@ -3392,6 +3420,7 @@
           <a:lstStyle xmlns:a="http://schemas.openxmlformats.org/drawingml/2006/main"/>
           <a:p xmlns:a="http://schemas.openxmlformats.org/drawingml/2006/main">
             <a:pPr algn="ctr">
+              <a:buNone/>
               <a:defRPr sz="675" b="1">
                 <a:solidFill>
                   <a:srgbClr val="C8F36B"/>
@@ -3491,6 +3520,7 @@
           <a:lstStyle xmlns:a="http://schemas.openxmlformats.org/drawingml/2006/main"/>
           <a:p xmlns:a="http://schemas.openxmlformats.org/drawingml/2006/main">
             <a:pPr algn="l">
+              <a:buNone/>
               <a:defRPr sz="1200" b="1">
                 <a:solidFill>
                   <a:srgbClr val="FFFFFF"/>
@@ -3612,6 +3642,7 @@
           <a:lstStyle xmlns:a="http://schemas.openxmlformats.org/drawingml/2006/main"/>
           <a:p xmlns:a="http://schemas.openxmlformats.org/drawingml/2006/main">
             <a:pPr algn="l">
+              <a:buNone/>
               <a:defRPr sz="825" b="0">
                 <a:solidFill>
                   <a:srgbClr val="68766F"/>
@@ -3630,7 +3661,7 @@
                 <a:ea typeface="Aptos"/>
                 <a:cs typeface="Aptos"/>
               </a:rPr>
-              <a:t>EC8204  •  CONSENTCHAIN  •  EG/2021/4877 + EG/2021/4651</a:t>
+              <a:t>EC8204  •  CONSENTCHAIN  •  TEAM 4877 / 4651 / 4667 / 4597</a:t>
             </a:r>
           </a:p>
         </p:txBody>
@@ -3676,6 +3707,7 @@
           <a:lstStyle xmlns:a="http://schemas.openxmlformats.org/drawingml/2006/main"/>
           <a:p xmlns:a="http://schemas.openxmlformats.org/drawingml/2006/main">
             <a:pPr algn="r">
+              <a:buNone/>
               <a:defRPr sz="825" b="0">
                 <a:solidFill>
                   <a:srgbClr val="68766F"/>
@@ -3775,6 +3807,7 @@
           <a:lstStyle xmlns:a="http://schemas.openxmlformats.org/drawingml/2006/main"/>
           <a:p xmlns:a="http://schemas.openxmlformats.org/drawingml/2006/main">
             <a:pPr algn="l">
+              <a:buNone/>
               <a:defRPr sz="900" b="1">
                 <a:solidFill>
                   <a:srgbClr val="2D6A54"/>
@@ -3839,6 +3872,7 @@
           <a:lstStyle xmlns:a="http://schemas.openxmlformats.org/drawingml/2006/main"/>
           <a:p xmlns:a="http://schemas.openxmlformats.org/drawingml/2006/main">
             <a:pPr algn="l">
+              <a:buNone/>
               <a:defRPr sz="3300" b="1">
                 <a:solidFill>
                   <a:srgbClr val="10231F"/>
@@ -3903,6 +3937,7 @@
           <a:lstStyle xmlns:a="http://schemas.openxmlformats.org/drawingml/2006/main"/>
           <a:p xmlns:a="http://schemas.openxmlformats.org/drawingml/2006/main">
             <a:pPr algn="l">
+              <a:buNone/>
               <a:defRPr sz="1425" b="0">
                 <a:solidFill>
                   <a:srgbClr val="68766F"/>
@@ -3967,6 +4002,7 @@
           <a:lstStyle xmlns:a="http://schemas.openxmlformats.org/drawingml/2006/main"/>
           <a:p xmlns:a="http://schemas.openxmlformats.org/drawingml/2006/main">
             <a:pPr algn="l">
+              <a:buNone/>
               <a:defRPr sz="1350" b="1">
                 <a:solidFill>
                   <a:srgbClr val="10231F"/>
@@ -4066,6 +4102,7 @@
           <a:lstStyle xmlns:a="http://schemas.openxmlformats.org/drawingml/2006/main"/>
           <a:p xmlns:a="http://schemas.openxmlformats.org/drawingml/2006/main">
             <a:pPr algn="l">
+              <a:buNone/>
               <a:defRPr sz="1350" b="1">
                 <a:solidFill>
                   <a:srgbClr val="10231F"/>
@@ -4165,6 +4202,7 @@
           <a:lstStyle xmlns:a="http://schemas.openxmlformats.org/drawingml/2006/main"/>
           <a:p xmlns:a="http://schemas.openxmlformats.org/drawingml/2006/main">
             <a:pPr algn="l">
+              <a:buNone/>
               <a:defRPr sz="1350" b="1">
                 <a:solidFill>
                   <a:srgbClr val="A83B43"/>
@@ -4297,6 +4335,7 @@
           <a:lstStyle xmlns:a="http://schemas.openxmlformats.org/drawingml/2006/main"/>
           <a:p xmlns:a="http://schemas.openxmlformats.org/drawingml/2006/main">
             <a:pPr algn="l">
+              <a:buNone/>
               <a:defRPr sz="1275" b="1">
                 <a:solidFill>
                   <a:srgbClr val="FFFFFF"/>
@@ -4361,6 +4400,7 @@
           <a:lstStyle xmlns:a="http://schemas.openxmlformats.org/drawingml/2006/main"/>
           <a:p xmlns:a="http://schemas.openxmlformats.org/drawingml/2006/main">
             <a:pPr algn="r">
+              <a:buNone/>
               <a:defRPr sz="975" b="0">
                 <a:solidFill>
                   <a:srgbClr val="C8F36B"/>
@@ -4458,6 +4498,7 @@
           <a:lstStyle xmlns:a="http://schemas.openxmlformats.org/drawingml/2006/main"/>
           <a:p xmlns:a="http://schemas.openxmlformats.org/drawingml/2006/main">
             <a:pPr algn="l">
+              <a:buNone/>
               <a:defRPr sz="1050" b="0">
                 <a:solidFill>
                   <a:srgbClr val="10231F"/>
@@ -4555,6 +4596,7 @@
           <a:lstStyle xmlns:a="http://schemas.openxmlformats.org/drawingml/2006/main"/>
           <a:p xmlns:a="http://schemas.openxmlformats.org/drawingml/2006/main">
             <a:pPr algn="l">
+              <a:buNone/>
               <a:defRPr sz="1050" b="0">
                 <a:solidFill>
                   <a:srgbClr val="10231F"/>
@@ -4652,6 +4694,7 @@
           <a:lstStyle xmlns:a="http://schemas.openxmlformats.org/drawingml/2006/main"/>
           <a:p xmlns:a="http://schemas.openxmlformats.org/drawingml/2006/main">
             <a:pPr algn="l">
+              <a:buNone/>
               <a:defRPr sz="1050" b="0">
                 <a:solidFill>
                   <a:srgbClr val="10231F"/>
@@ -4749,6 +4792,7 @@
           <a:lstStyle xmlns:a="http://schemas.openxmlformats.org/drawingml/2006/main"/>
           <a:p xmlns:a="http://schemas.openxmlformats.org/drawingml/2006/main">
             <a:pPr algn="l">
+              <a:buNone/>
               <a:defRPr sz="1050" b="0">
                 <a:solidFill>
                   <a:srgbClr val="10231F"/>
@@ -4846,6 +4890,7 @@
           <a:lstStyle xmlns:a="http://schemas.openxmlformats.org/drawingml/2006/main"/>
           <a:p xmlns:a="http://schemas.openxmlformats.org/drawingml/2006/main">
             <a:pPr algn="l">
+              <a:buNone/>
               <a:defRPr sz="1050" b="0">
                 <a:solidFill>
                   <a:srgbClr val="10231F"/>
@@ -4945,6 +4990,7 @@
           <a:lstStyle xmlns:a="http://schemas.openxmlformats.org/drawingml/2006/main"/>
           <a:p xmlns:a="http://schemas.openxmlformats.org/drawingml/2006/main">
             <a:pPr algn="ctr">
+              <a:buNone/>
               <a:defRPr sz="1125" b="1">
                 <a:solidFill>
                   <a:srgbClr val="FFFFFF"/>
@@ -5066,6 +5112,7 @@
           <a:lstStyle xmlns:a="http://schemas.openxmlformats.org/drawingml/2006/main"/>
           <a:p xmlns:a="http://schemas.openxmlformats.org/drawingml/2006/main">
             <a:pPr algn="l">
+              <a:buNone/>
               <a:defRPr sz="825" b="0">
                 <a:solidFill>
                   <a:srgbClr val="A9BBB4"/>
@@ -5084,7 +5131,7 @@
                 <a:ea typeface="Aptos"/>
                 <a:cs typeface="Aptos"/>
               </a:rPr>
-              <a:t>EC8204  •  CONSENTCHAIN  •  EG/2021/4877 + EG/2021/4651</a:t>
+              <a:t>EC8204  •  CONSENTCHAIN  •  TEAM 4877 / 4651 / 4667 / 4597</a:t>
             </a:r>
           </a:p>
         </p:txBody>
@@ -5130,6 +5177,7 @@
           <a:lstStyle xmlns:a="http://schemas.openxmlformats.org/drawingml/2006/main"/>
           <a:p xmlns:a="http://schemas.openxmlformats.org/drawingml/2006/main">
             <a:pPr algn="r">
+              <a:buNone/>
               <a:defRPr sz="825" b="0">
                 <a:solidFill>
                   <a:srgbClr val="A9BBB4"/>
@@ -5229,6 +5277,7 @@
           <a:lstStyle xmlns:a="http://schemas.openxmlformats.org/drawingml/2006/main"/>
           <a:p xmlns:a="http://schemas.openxmlformats.org/drawingml/2006/main">
             <a:pPr algn="l">
+              <a:buNone/>
               <a:defRPr sz="900" b="1">
                 <a:solidFill>
                   <a:srgbClr val="C8F36B"/>
@@ -5293,6 +5342,7 @@
           <a:lstStyle xmlns:a="http://schemas.openxmlformats.org/drawingml/2006/main"/>
           <a:p xmlns:a="http://schemas.openxmlformats.org/drawingml/2006/main">
             <a:pPr algn="l">
+              <a:buNone/>
               <a:defRPr sz="3300" b="1">
                 <a:solidFill>
                   <a:srgbClr val="FFFFFF"/>
@@ -5357,6 +5407,7 @@
           <a:lstStyle xmlns:a="http://schemas.openxmlformats.org/drawingml/2006/main"/>
           <a:p xmlns:a="http://schemas.openxmlformats.org/drawingml/2006/main">
             <a:pPr algn="r">
+              <a:buNone/>
               <a:defRPr sz="4050" b="1">
                 <a:solidFill>
                   <a:srgbClr val="C8F36B"/>
@@ -5421,6 +5472,7 @@
           <a:lstStyle xmlns:a="http://schemas.openxmlformats.org/drawingml/2006/main"/>
           <a:p xmlns:a="http://schemas.openxmlformats.org/drawingml/2006/main">
             <a:pPr algn="r">
+              <a:buNone/>
               <a:defRPr sz="825" b="1">
                 <a:solidFill>
                   <a:srgbClr val="A9BBB4"/>
@@ -5485,6 +5537,7 @@
           <a:lstStyle xmlns:a="http://schemas.openxmlformats.org/drawingml/2006/main"/>
           <a:p xmlns:a="http://schemas.openxmlformats.org/drawingml/2006/main">
             <a:pPr algn="l">
+              <a:buNone/>
               <a:defRPr sz="825" b="1">
                 <a:solidFill>
                   <a:srgbClr val="C8F36B"/>
@@ -5549,6 +5602,7 @@
           <a:lstStyle xmlns:a="http://schemas.openxmlformats.org/drawingml/2006/main"/>
           <a:p xmlns:a="http://schemas.openxmlformats.org/drawingml/2006/main">
             <a:pPr algn="l">
+              <a:buNone/>
               <a:defRPr sz="825" b="1">
                 <a:solidFill>
                   <a:srgbClr val="C8F36B"/>
@@ -5613,6 +5667,7 @@
           <a:lstStyle xmlns:a="http://schemas.openxmlformats.org/drawingml/2006/main"/>
           <a:p xmlns:a="http://schemas.openxmlformats.org/drawingml/2006/main">
             <a:pPr algn="l">
+              <a:buNone/>
               <a:defRPr sz="825" b="1">
                 <a:solidFill>
                   <a:srgbClr val="C8F36B"/>
@@ -5712,6 +5767,7 @@
           <a:lstStyle xmlns:a="http://schemas.openxmlformats.org/drawingml/2006/main"/>
           <a:p xmlns:a="http://schemas.openxmlformats.org/drawingml/2006/main">
             <a:pPr algn="l">
+              <a:buNone/>
               <a:defRPr sz="1050" b="1">
                 <a:solidFill>
                   <a:srgbClr val="FFFFFF"/>
@@ -5776,6 +5832,7 @@
           <a:lstStyle xmlns:a="http://schemas.openxmlformats.org/drawingml/2006/main"/>
           <a:p xmlns:a="http://schemas.openxmlformats.org/drawingml/2006/main">
             <a:pPr algn="l">
+              <a:buNone/>
               <a:defRPr sz="1200" b="0">
                 <a:solidFill>
                   <a:srgbClr val="FFFFFF"/>
@@ -5840,6 +5897,7 @@
           <a:lstStyle xmlns:a="http://schemas.openxmlformats.org/drawingml/2006/main"/>
           <a:p xmlns:a="http://schemas.openxmlformats.org/drawingml/2006/main">
             <a:pPr algn="l">
+              <a:buNone/>
               <a:defRPr sz="1050" b="0">
                 <a:solidFill>
                   <a:srgbClr val="C8F36B"/>
@@ -5939,6 +5997,7 @@
           <a:lstStyle xmlns:a="http://schemas.openxmlformats.org/drawingml/2006/main"/>
           <a:p xmlns:a="http://schemas.openxmlformats.org/drawingml/2006/main">
             <a:pPr algn="l">
+              <a:buNone/>
               <a:defRPr sz="1050" b="1">
                 <a:solidFill>
                   <a:srgbClr val="FFFFFF"/>
@@ -6003,6 +6062,7 @@
           <a:lstStyle xmlns:a="http://schemas.openxmlformats.org/drawingml/2006/main"/>
           <a:p xmlns:a="http://schemas.openxmlformats.org/drawingml/2006/main">
             <a:pPr algn="l">
+              <a:buNone/>
               <a:defRPr sz="1200" b="0">
                 <a:solidFill>
                   <a:srgbClr val="FFFFFF"/>
@@ -6067,6 +6127,7 @@
           <a:lstStyle xmlns:a="http://schemas.openxmlformats.org/drawingml/2006/main"/>
           <a:p xmlns:a="http://schemas.openxmlformats.org/drawingml/2006/main">
             <a:pPr algn="l">
+              <a:buNone/>
               <a:defRPr sz="1050" b="0">
                 <a:solidFill>
                   <a:srgbClr val="C8F36B"/>
@@ -6166,6 +6227,7 @@
           <a:lstStyle xmlns:a="http://schemas.openxmlformats.org/drawingml/2006/main"/>
           <a:p xmlns:a="http://schemas.openxmlformats.org/drawingml/2006/main">
             <a:pPr algn="l">
+              <a:buNone/>
               <a:defRPr sz="1050" b="1">
                 <a:solidFill>
                   <a:srgbClr val="FFFFFF"/>
@@ -6230,6 +6292,7 @@
           <a:lstStyle xmlns:a="http://schemas.openxmlformats.org/drawingml/2006/main"/>
           <a:p xmlns:a="http://schemas.openxmlformats.org/drawingml/2006/main">
             <a:pPr algn="l">
+              <a:buNone/>
               <a:defRPr sz="1200" b="0">
                 <a:solidFill>
                   <a:srgbClr val="FFFFFF"/>
@@ -6294,6 +6357,7 @@
           <a:lstStyle xmlns:a="http://schemas.openxmlformats.org/drawingml/2006/main"/>
           <a:p xmlns:a="http://schemas.openxmlformats.org/drawingml/2006/main">
             <a:pPr algn="l">
+              <a:buNone/>
               <a:defRPr sz="1050" b="0">
                 <a:solidFill>
                   <a:srgbClr val="C8F36B"/>
@@ -6393,6 +6457,7 @@
           <a:lstStyle xmlns:a="http://schemas.openxmlformats.org/drawingml/2006/main"/>
           <a:p xmlns:a="http://schemas.openxmlformats.org/drawingml/2006/main">
             <a:pPr algn="l">
+              <a:buNone/>
               <a:defRPr sz="1050" b="1">
                 <a:solidFill>
                   <a:srgbClr val="FFFFFF"/>
@@ -6457,6 +6522,7 @@
           <a:lstStyle xmlns:a="http://schemas.openxmlformats.org/drawingml/2006/main"/>
           <a:p xmlns:a="http://schemas.openxmlformats.org/drawingml/2006/main">
             <a:pPr algn="l">
+              <a:buNone/>
               <a:defRPr sz="1200" b="0">
                 <a:solidFill>
                   <a:srgbClr val="FFFFFF"/>
@@ -6521,6 +6587,7 @@
           <a:lstStyle xmlns:a="http://schemas.openxmlformats.org/drawingml/2006/main"/>
           <a:p xmlns:a="http://schemas.openxmlformats.org/drawingml/2006/main">
             <a:pPr algn="l">
+              <a:buNone/>
               <a:defRPr sz="1050" b="0">
                 <a:solidFill>
                   <a:srgbClr val="C8F36B"/>
@@ -6620,6 +6687,7 @@
           <a:lstStyle xmlns:a="http://schemas.openxmlformats.org/drawingml/2006/main"/>
           <a:p xmlns:a="http://schemas.openxmlformats.org/drawingml/2006/main">
             <a:pPr algn="l">
+              <a:buNone/>
               <a:defRPr sz="1050" b="1">
                 <a:solidFill>
                   <a:srgbClr val="FFFFFF"/>
@@ -6684,6 +6752,7 @@
           <a:lstStyle xmlns:a="http://schemas.openxmlformats.org/drawingml/2006/main"/>
           <a:p xmlns:a="http://schemas.openxmlformats.org/drawingml/2006/main">
             <a:pPr algn="l">
+              <a:buNone/>
               <a:defRPr sz="1200" b="0">
                 <a:solidFill>
                   <a:srgbClr val="FFFFFF"/>
@@ -6748,6 +6817,7 @@
           <a:lstStyle xmlns:a="http://schemas.openxmlformats.org/drawingml/2006/main"/>
           <a:p xmlns:a="http://schemas.openxmlformats.org/drawingml/2006/main">
             <a:pPr algn="l">
+              <a:buNone/>
               <a:defRPr sz="1050" b="0">
                 <a:solidFill>
                   <a:srgbClr val="C8F36B"/>
@@ -6847,6 +6917,7 @@
           <a:lstStyle xmlns:a="http://schemas.openxmlformats.org/drawingml/2006/main"/>
           <a:p xmlns:a="http://schemas.openxmlformats.org/drawingml/2006/main">
             <a:pPr algn="l">
+              <a:buNone/>
               <a:defRPr sz="1050" b="1">
                 <a:solidFill>
                   <a:srgbClr val="FFFFFF"/>
@@ -6911,6 +6982,7 @@
           <a:lstStyle xmlns:a="http://schemas.openxmlformats.org/drawingml/2006/main"/>
           <a:p xmlns:a="http://schemas.openxmlformats.org/drawingml/2006/main">
             <a:pPr algn="l">
+              <a:buNone/>
               <a:defRPr sz="1200" b="0">
                 <a:solidFill>
                   <a:srgbClr val="FFFFFF"/>
@@ -6975,6 +7047,7 @@
           <a:lstStyle xmlns:a="http://schemas.openxmlformats.org/drawingml/2006/main"/>
           <a:p xmlns:a="http://schemas.openxmlformats.org/drawingml/2006/main">
             <a:pPr algn="l">
+              <a:buNone/>
               <a:defRPr sz="1050" b="0">
                 <a:solidFill>
                   <a:srgbClr val="C8F36B"/>
@@ -7096,6 +7169,7 @@
           <a:lstStyle xmlns:a="http://schemas.openxmlformats.org/drawingml/2006/main"/>
           <a:p xmlns:a="http://schemas.openxmlformats.org/drawingml/2006/main">
             <a:pPr algn="l">
+              <a:buNone/>
               <a:defRPr sz="825" b="0">
                 <a:solidFill>
                   <a:srgbClr val="68766F"/>
@@ -7114,7 +7188,7 @@
                 <a:ea typeface="Aptos"/>
                 <a:cs typeface="Aptos"/>
               </a:rPr>
-              <a:t>EC8204  •  CONSENTCHAIN  •  EG/2021/4877 + EG/2021/4651</a:t>
+              <a:t>EC8204  •  CONSENTCHAIN  •  TEAM 4877 / 4651 / 4667 / 4597</a:t>
             </a:r>
           </a:p>
         </p:txBody>
@@ -7160,6 +7234,7 @@
           <a:lstStyle xmlns:a="http://schemas.openxmlformats.org/drawingml/2006/main"/>
           <a:p xmlns:a="http://schemas.openxmlformats.org/drawingml/2006/main">
             <a:pPr algn="r">
+              <a:buNone/>
               <a:defRPr sz="825" b="0">
                 <a:solidFill>
                   <a:srgbClr val="68766F"/>
@@ -7259,6 +7334,7 @@
           <a:lstStyle xmlns:a="http://schemas.openxmlformats.org/drawingml/2006/main"/>
           <a:p xmlns:a="http://schemas.openxmlformats.org/drawingml/2006/main">
             <a:pPr algn="l">
+              <a:buNone/>
               <a:defRPr sz="900" b="1">
                 <a:solidFill>
                   <a:srgbClr val="2D6A54"/>
@@ -7323,6 +7399,7 @@
           <a:lstStyle xmlns:a="http://schemas.openxmlformats.org/drawingml/2006/main"/>
           <a:p xmlns:a="http://schemas.openxmlformats.org/drawingml/2006/main">
             <a:pPr algn="l">
+              <a:buNone/>
               <a:defRPr sz="3600" b="1">
                 <a:solidFill>
                   <a:srgbClr val="10231F"/>
@@ -7422,6 +7499,7 @@
           <a:lstStyle xmlns:a="http://schemas.openxmlformats.org/drawingml/2006/main"/>
           <a:p xmlns:a="http://schemas.openxmlformats.org/drawingml/2006/main">
             <a:pPr algn="l">
+              <a:buNone/>
               <a:defRPr sz="1950" b="1">
                 <a:solidFill>
                   <a:srgbClr val="2D6A54"/>
@@ -7486,6 +7564,7 @@
           <a:lstStyle xmlns:a="http://schemas.openxmlformats.org/drawingml/2006/main"/>
           <a:p xmlns:a="http://schemas.openxmlformats.org/drawingml/2006/main">
             <a:pPr algn="l">
+              <a:buNone/>
               <a:defRPr sz="1425" b="1">
                 <a:solidFill>
                   <a:srgbClr val="10231F"/>
@@ -7550,6 +7629,7 @@
           <a:lstStyle xmlns:a="http://schemas.openxmlformats.org/drawingml/2006/main"/>
           <a:p xmlns:a="http://schemas.openxmlformats.org/drawingml/2006/main">
             <a:pPr algn="l">
+              <a:buNone/>
               <a:defRPr sz="1050" b="0">
                 <a:solidFill>
                   <a:srgbClr val="68766F"/>
@@ -7649,6 +7729,7 @@
           <a:lstStyle xmlns:a="http://schemas.openxmlformats.org/drawingml/2006/main"/>
           <a:p xmlns:a="http://schemas.openxmlformats.org/drawingml/2006/main">
             <a:pPr algn="l">
+              <a:buNone/>
               <a:defRPr sz="1950" b="1">
                 <a:solidFill>
                   <a:srgbClr val="2D6A54"/>
@@ -7713,6 +7794,7 @@
           <a:lstStyle xmlns:a="http://schemas.openxmlformats.org/drawingml/2006/main"/>
           <a:p xmlns:a="http://schemas.openxmlformats.org/drawingml/2006/main">
             <a:pPr algn="l">
+              <a:buNone/>
               <a:defRPr sz="1425" b="1">
                 <a:solidFill>
                   <a:srgbClr val="10231F"/>
@@ -7777,6 +7859,7 @@
           <a:lstStyle xmlns:a="http://schemas.openxmlformats.org/drawingml/2006/main"/>
           <a:p xmlns:a="http://schemas.openxmlformats.org/drawingml/2006/main">
             <a:pPr algn="l">
+              <a:buNone/>
               <a:defRPr sz="1050" b="0">
                 <a:solidFill>
                   <a:srgbClr val="68766F"/>
@@ -7876,6 +7959,7 @@
           <a:lstStyle xmlns:a="http://schemas.openxmlformats.org/drawingml/2006/main"/>
           <a:p xmlns:a="http://schemas.openxmlformats.org/drawingml/2006/main">
             <a:pPr algn="l">
+              <a:buNone/>
               <a:defRPr sz="1950" b="1">
                 <a:solidFill>
                   <a:srgbClr val="2D6A54"/>
@@ -7940,6 +8024,7 @@
           <a:lstStyle xmlns:a="http://schemas.openxmlformats.org/drawingml/2006/main"/>
           <a:p xmlns:a="http://schemas.openxmlformats.org/drawingml/2006/main">
             <a:pPr algn="l">
+              <a:buNone/>
               <a:defRPr sz="1425" b="1">
                 <a:solidFill>
                   <a:srgbClr val="10231F"/>
@@ -8004,6 +8089,7 @@
           <a:lstStyle xmlns:a="http://schemas.openxmlformats.org/drawingml/2006/main"/>
           <a:p xmlns:a="http://schemas.openxmlformats.org/drawingml/2006/main">
             <a:pPr algn="l">
+              <a:buNone/>
               <a:defRPr sz="1050" b="0">
                 <a:solidFill>
                   <a:srgbClr val="68766F"/>
@@ -8103,6 +8189,7 @@
           <a:lstStyle xmlns:a="http://schemas.openxmlformats.org/drawingml/2006/main"/>
           <a:p xmlns:a="http://schemas.openxmlformats.org/drawingml/2006/main">
             <a:pPr algn="l">
+              <a:buNone/>
               <a:defRPr sz="1950" b="1">
                 <a:solidFill>
                   <a:srgbClr val="2D6A54"/>
@@ -8167,6 +8254,7 @@
           <a:lstStyle xmlns:a="http://schemas.openxmlformats.org/drawingml/2006/main"/>
           <a:p xmlns:a="http://schemas.openxmlformats.org/drawingml/2006/main">
             <a:pPr algn="l">
+              <a:buNone/>
               <a:defRPr sz="1425" b="1">
                 <a:solidFill>
                   <a:srgbClr val="10231F"/>
@@ -8231,6 +8319,7 @@
           <a:lstStyle xmlns:a="http://schemas.openxmlformats.org/drawingml/2006/main"/>
           <a:p xmlns:a="http://schemas.openxmlformats.org/drawingml/2006/main">
             <a:pPr algn="l">
+              <a:buNone/>
               <a:defRPr sz="1050" b="0">
                 <a:solidFill>
                   <a:srgbClr val="68766F"/>
@@ -8330,6 +8419,7 @@
           <a:lstStyle xmlns:a="http://schemas.openxmlformats.org/drawingml/2006/main"/>
           <a:p xmlns:a="http://schemas.openxmlformats.org/drawingml/2006/main">
             <a:pPr algn="l">
+              <a:buNone/>
               <a:defRPr sz="1950" b="1">
                 <a:solidFill>
                   <a:srgbClr val="A83B43"/>
@@ -8394,6 +8484,7 @@
           <a:lstStyle xmlns:a="http://schemas.openxmlformats.org/drawingml/2006/main"/>
           <a:p xmlns:a="http://schemas.openxmlformats.org/drawingml/2006/main">
             <a:pPr algn="l">
+              <a:buNone/>
               <a:defRPr sz="1425" b="1">
                 <a:solidFill>
                   <a:srgbClr val="10231F"/>
@@ -8458,6 +8549,7 @@
           <a:lstStyle xmlns:a="http://schemas.openxmlformats.org/drawingml/2006/main"/>
           <a:p xmlns:a="http://schemas.openxmlformats.org/drawingml/2006/main">
             <a:pPr algn="l">
+              <a:buNone/>
               <a:defRPr sz="1050" b="0">
                 <a:solidFill>
                   <a:srgbClr val="68766F"/>
@@ -8557,6 +8649,7 @@
           <a:lstStyle xmlns:a="http://schemas.openxmlformats.org/drawingml/2006/main"/>
           <a:p xmlns:a="http://schemas.openxmlformats.org/drawingml/2006/main">
             <a:pPr algn="ctr">
+              <a:buNone/>
               <a:defRPr sz="1425" b="1">
                 <a:solidFill>
                   <a:srgbClr val="10231F"/>
